--- a/server/test/fixtures/table.pptx
+++ b/server/test/fixtures/table.pptx
@@ -154,4 +154,70 @@
     </p:spTree>
   </p:cSld>
 </p:sld>
+</file>
+
+<file path=ppt/slides/slide3.xml><?xml version="1.0" encoding="utf-8"?>
+<p:sld xmlns:a="http://schemas.openxmlformats.org/drawingml/2006/main" xmlns:p="http://schemas.openxmlformats.org/presentationml/2006/main">
+  <p:cSld>
+    <p:spTree>
+      <p:graphicFrame>
+        <a:graphic>
+          <a:graphicData>
+            <a:tbl>
+              <a:tblPr/>
+              <a:tblGrid>
+                <a:gridCol w="100"/>
+                <a:gridCol w="100"/>
+              </a:tblGrid>
+              <a:tr h="370840">
+                <a:tc gridSpan="2">
+                  <a:txBody>
+                    <a:p>
+                      <a:r>
+                        <a:t>가로 앞</a:t>
+                      </a:r>
+                    </a:p>
+                  </a:txBody>
+                  <a:tcPr/>
+                </a:tc>
+                <a:tc hMerge="1">
+                  <a:txBody>
+                    <a:p>
+                      <a:r>
+                        <a:t>가로뒤_남은글</a:t>
+                      </a:r>
+                    </a:p>
+                  </a:txBody>
+                  <a:tcPr/>
+                </a:tc>
+              </a:tr>
+              <a:tr h="370840">
+                <a:tc>
+                  <a:txBody>
+                    <a:p>
+                      <a:r>
+                        <a:t>세로 위</a:t>
+                      </a:r>
+                    </a:p>
+                  </a:txBody>
+                  <a:tcPr/>
+                </a:tc>
+                <a:tc vMerge="1">
+                  <a:txBody>
+                    <a:p>
+                      <a:r>
+                        <a:t>세로아래_남은글</a:t>
+                      </a:r>
+                    </a:p>
+                  </a:txBody>
+                  <a:tcPr/>
+                </a:tc>
+              </a:tr>
+            </a:tbl>
+          </a:graphicData>
+        </a:graphic>
+      </p:graphicFrame>
+    </p:spTree>
+  </p:cSld>
+</p:sld>
 </file>